--- a/report/marl_pong_presentation.pptx
+++ b/report/marl_pong_presentation.pptx
@@ -173,7 +173,7 @@
           </c:tx>
           <c:spPr>
             <a:solidFill>
-              <a:srgbClr val="50A0FF"/>
+              <a:srgbClr val="2B7FFF"/>
             </a:solidFill>
             <a:effectLst/>
           </c:spPr>
@@ -380,7 +380,7 @@
             <a:pPr>
               <a:defRPr sz="1300" b="0" i="0" u="none" strike="noStrike">
                 <a:solidFill>
-                  <a:srgbClr val="66718A"/>
+                  <a:srgbClr val="5B677F"/>
                 </a:solidFill>
                 <a:latin typeface="Arial"/>
               </a:defRPr>
@@ -434,7 +434,7 @@
             <a:pPr>
               <a:defRPr sz="1200" b="0" i="0" u="none" strike="noStrike">
                 <a:solidFill>
-                  <a:srgbClr val="66718A"/>
+                  <a:srgbClr val="5B677F"/>
                 </a:solidFill>
                 <a:latin typeface="Arial"/>
               </a:defRPr>
@@ -465,7 +465,7 @@
           <a:pPr>
             <a:defRPr sz="1300">
               <a:solidFill>
-                <a:srgbClr val="66718A"/>
+                <a:srgbClr val="5B677F"/>
               </a:solidFill>
             </a:defRPr>
           </a:pPr>
@@ -548,7 +548,7 @@
           </c:tx>
           <c:spPr>
             <a:solidFill>
-              <a:srgbClr val="50A0FF"/>
+              <a:srgbClr val="2B7FFF"/>
             </a:solidFill>
             <a:effectLst/>
           </c:spPr>
@@ -631,7 +631,7 @@
           </c:tx>
           <c:spPr>
             <a:solidFill>
-              <a:srgbClr val="FF785A"/>
+              <a:srgbClr val="E85D3F"/>
             </a:solidFill>
             <a:effectLst/>
           </c:spPr>
@@ -755,7 +755,7 @@
             <a:pPr>
               <a:defRPr sz="1300" b="0" i="0" u="none" strike="noStrike">
                 <a:solidFill>
-                  <a:srgbClr val="66718A"/>
+                  <a:srgbClr val="5B677F"/>
                 </a:solidFill>
                 <a:latin typeface="Arial"/>
               </a:defRPr>
@@ -809,7 +809,7 @@
             <a:pPr>
               <a:defRPr sz="1200" b="0" i="0" u="none" strike="noStrike">
                 <a:solidFill>
-                  <a:srgbClr val="66718A"/>
+                  <a:srgbClr val="5B677F"/>
                 </a:solidFill>
                 <a:latin typeface="Arial"/>
               </a:defRPr>
@@ -840,7 +840,7 @@
           <a:pPr>
             <a:defRPr sz="1300">
               <a:solidFill>
-                <a:srgbClr val="66718A"/>
+                <a:srgbClr val="5B677F"/>
               </a:solidFill>
             </a:defRPr>
           </a:pPr>
@@ -2408,7 +2408,7 @@
     <p:bg>
       <p:bgPr>
         <a:solidFill>
-          <a:srgbClr val="0A0F1E"/>
+          <a:srgbClr val="FFFFFF"/>
         </a:solidFill>
       </p:bgPr>
     </p:bg>
@@ -2453,7 +2453,7 @@
             <a:r>
               <a:rPr lang="en-US" sz="1400" b="1" spc="400" kern="0" dirty="0">
                 <a:solidFill>
-                  <a:srgbClr val="50A0FF"/>
+                  <a:srgbClr val="2B7FFF"/>
                 </a:solidFill>
                 <a:latin typeface="Arial" pitchFamily="34" charset="0"/>
                 <a:ea typeface="Arial" pitchFamily="34" charset="-122"/>
@@ -2492,7 +2492,7 @@
             <a:r>
               <a:rPr lang="en-US" sz="5400" b="1" dirty="0">
                 <a:solidFill>
-                  <a:srgbClr val="E8EEFA"/>
+                  <a:srgbClr val="182238"/>
                 </a:solidFill>
                 <a:latin typeface="Arial" pitchFamily="34" charset="0"/>
                 <a:ea typeface="Arial" pitchFamily="34" charset="-122"/>
@@ -2531,7 +2531,7 @@
             <a:r>
               <a:rPr lang="en-US" sz="2000" dirty="0">
                 <a:solidFill>
-                  <a:srgbClr val="8FA0C4"/>
+                  <a:srgbClr val="5B677F"/>
                 </a:solidFill>
                 <a:latin typeface="Arial" pitchFamily="34" charset="0"/>
                 <a:ea typeface="Arial" pitchFamily="34" charset="-122"/>
@@ -2560,11 +2560,11 @@
             </a:avLst>
           </a:prstGeom>
           <a:solidFill>
-            <a:srgbClr val="111A30"/>
+            <a:srgbClr val="F5F7FA"/>
           </a:solidFill>
           <a:ln w="12700">
             <a:solidFill>
-              <a:srgbClr val="2A3A5E"/>
+              <a:srgbClr val="D8DEE9"/>
             </a:solidFill>
             <a:prstDash val="solid"/>
           </a:ln>
@@ -2587,7 +2587,7 @@
           <a:noFill/>
           <a:ln w="12700">
             <a:solidFill>
-              <a:srgbClr val="2A3A5E"/>
+              <a:srgbClr val="D8DEE9"/>
             </a:solidFill>
             <a:prstDash val="dash"/>
           </a:ln>
@@ -2610,7 +2610,7 @@
             </a:avLst>
           </a:prstGeom>
           <a:solidFill>
-            <a:srgbClr val="50A0FF"/>
+            <a:srgbClr val="2B7FFF"/>
           </a:solidFill>
           <a:ln/>
         </p:spPr>
@@ -2654,7 +2654,7 @@
             </a:avLst>
           </a:prstGeom>
           <a:solidFill>
-            <a:srgbClr val="FF785A"/>
+            <a:srgbClr val="E85D3F"/>
           </a:solidFill>
           <a:ln/>
         </p:spPr>
@@ -2696,7 +2696,7 @@
             <a:avLst/>
           </a:prstGeom>
           <a:solidFill>
-            <a:srgbClr val="F2F2F2"/>
+            <a:srgbClr val="1C2A4A"/>
           </a:solidFill>
           <a:ln/>
         </p:spPr>
@@ -2728,7 +2728,7 @@
             <a:r>
               <a:rPr lang="en-US" sz="1200" dirty="0">
                 <a:solidFill>
-                  <a:srgbClr val="8FA0C4"/>
+                  <a:srgbClr val="5B677F"/>
                 </a:solidFill>
                 <a:latin typeface="Arial" pitchFamily="34" charset="0"/>
                 <a:ea typeface="Arial" pitchFamily="34" charset="-122"/>
@@ -2767,7 +2767,7 @@
             <a:r>
               <a:rPr lang="en-US" sz="1200" dirty="0">
                 <a:solidFill>
-                  <a:srgbClr val="8FA0C4"/>
+                  <a:srgbClr val="5B677F"/>
                 </a:solidFill>
                 <a:latin typeface="Arial" pitchFamily="34" charset="0"/>
                 <a:ea typeface="Arial" pitchFamily="34" charset="-122"/>
@@ -2793,7 +2793,7 @@
     <p:bg>
       <p:bgPr>
         <a:solidFill>
-          <a:srgbClr val="0A0F1E"/>
+          <a:srgbClr val="FFFFFF"/>
         </a:solidFill>
       </p:bgPr>
     </p:bg>
@@ -2838,7 +2838,7 @@
             <a:r>
               <a:rPr lang="en-US" sz="1400" b="1" spc="400" kern="0" dirty="0">
                 <a:solidFill>
-                  <a:srgbClr val="50A0FF"/>
+                  <a:srgbClr val="2B7FFF"/>
                 </a:solidFill>
                 <a:latin typeface="Arial" pitchFamily="34" charset="0"/>
                 <a:ea typeface="Arial" pitchFamily="34" charset="-122"/>
@@ -2877,7 +2877,7 @@
             <a:r>
               <a:rPr lang="en-US" sz="3600" b="1" dirty="0">
                 <a:solidFill>
-                  <a:srgbClr val="E8EEFA"/>
+                  <a:srgbClr val="182238"/>
                 </a:solidFill>
                 <a:latin typeface="Arial" pitchFamily="34" charset="0"/>
                 <a:ea typeface="Arial" pitchFamily="34" charset="-122"/>
@@ -2916,7 +2916,7 @@
             <a:r>
               <a:rPr lang="en-US" sz="1800" b="1" dirty="0">
                 <a:solidFill>
-                  <a:srgbClr val="E8EEFA"/>
+                  <a:srgbClr val="182238"/>
                 </a:solidFill>
                 <a:latin typeface="Arial" pitchFamily="34" charset="0"/>
                 <a:ea typeface="Arial" pitchFamily="34" charset="-122"/>
@@ -2955,7 +2955,7 @@
             <a:r>
               <a:rPr lang="en-US" sz="1500" dirty="0">
                 <a:solidFill>
-                  <a:srgbClr val="8FA0C4"/>
+                  <a:srgbClr val="5B677F"/>
                 </a:solidFill>
                 <a:latin typeface="Arial" pitchFamily="34" charset="0"/>
                 <a:ea typeface="Arial" pitchFamily="34" charset="-122"/>
@@ -2984,7 +2984,7 @@
           <a:noFill/>
           <a:ln w="9525">
             <a:solidFill>
-              <a:srgbClr val="2A3A5E"/>
+              <a:srgbClr val="D8DEE9"/>
             </a:solidFill>
             <a:prstDash val="solid"/>
           </a:ln>
@@ -3017,7 +3017,7 @@
             <a:r>
               <a:rPr lang="en-US" sz="1800" b="1" dirty="0">
                 <a:solidFill>
-                  <a:srgbClr val="E8EEFA"/>
+                  <a:srgbClr val="182238"/>
                 </a:solidFill>
                 <a:latin typeface="Arial" pitchFamily="34" charset="0"/>
                 <a:ea typeface="Arial" pitchFamily="34" charset="-122"/>
@@ -3056,7 +3056,7 @@
             <a:r>
               <a:rPr lang="en-US" sz="1500" dirty="0">
                 <a:solidFill>
-                  <a:srgbClr val="8FA0C4"/>
+                  <a:srgbClr val="5B677F"/>
                 </a:solidFill>
                 <a:latin typeface="Arial" pitchFamily="34" charset="0"/>
                 <a:ea typeface="Arial" pitchFamily="34" charset="-122"/>
@@ -3085,7 +3085,7 @@
           <a:noFill/>
           <a:ln w="9525">
             <a:solidFill>
-              <a:srgbClr val="2A3A5E"/>
+              <a:srgbClr val="D8DEE9"/>
             </a:solidFill>
             <a:prstDash val="solid"/>
           </a:ln>
@@ -3118,7 +3118,7 @@
             <a:r>
               <a:rPr lang="en-US" sz="1800" b="1" dirty="0">
                 <a:solidFill>
-                  <a:srgbClr val="E8EEFA"/>
+                  <a:srgbClr val="182238"/>
                 </a:solidFill>
                 <a:latin typeface="Arial" pitchFamily="34" charset="0"/>
                 <a:ea typeface="Arial" pitchFamily="34" charset="-122"/>
@@ -3157,7 +3157,7 @@
             <a:r>
               <a:rPr lang="en-US" sz="1500" dirty="0">
                 <a:solidFill>
-                  <a:srgbClr val="8FA0C4"/>
+                  <a:srgbClr val="5B677F"/>
                 </a:solidFill>
                 <a:latin typeface="Arial" pitchFamily="34" charset="0"/>
                 <a:ea typeface="Arial" pitchFamily="34" charset="-122"/>
@@ -3196,7 +3196,7 @@
             <a:r>
               <a:rPr lang="en-US" sz="1200" dirty="0">
                 <a:solidFill>
-                  <a:srgbClr val="8FA0C4"/>
+                  <a:srgbClr val="5B677F"/>
                 </a:solidFill>
                 <a:latin typeface="Arial" pitchFamily="34" charset="0"/>
                 <a:ea typeface="Arial" pitchFamily="34" charset="-122"/>
@@ -3267,7 +3267,7 @@
             <a:r>
               <a:rPr lang="en-US" sz="1200" b="1" spc="300" kern="0" dirty="0">
                 <a:solidFill>
-                  <a:srgbClr val="50A0FF"/>
+                  <a:srgbClr val="2B7FFF"/>
                 </a:solidFill>
                 <a:latin typeface="Arial" pitchFamily="34" charset="0"/>
                 <a:ea typeface="Arial" pitchFamily="34" charset="-122"/>
@@ -3335,11 +3335,11 @@
             </a:avLst>
           </a:prstGeom>
           <a:solidFill>
-            <a:srgbClr val="111A30"/>
+            <a:srgbClr val="F5F7FA"/>
           </a:solidFill>
           <a:ln w="12700">
             <a:solidFill>
-              <a:srgbClr val="2A3A5E"/>
+              <a:srgbClr val="D8DEE9"/>
             </a:solidFill>
             <a:prstDash val="solid"/>
           </a:ln>
@@ -3362,7 +3362,7 @@
           <a:noFill/>
           <a:ln w="12700">
             <a:solidFill>
-              <a:srgbClr val="2A3A5E"/>
+              <a:srgbClr val="D8DEE9"/>
             </a:solidFill>
             <a:prstDash val="dash"/>
           </a:ln>
@@ -3383,7 +3383,7 @@
             <a:avLst/>
           </a:prstGeom>
           <a:solidFill>
-            <a:srgbClr val="50A0FF">
+            <a:srgbClr val="2B7FFF">
               <a:alpha val="12000"/>
             </a:srgbClr>
           </a:solidFill>
@@ -3407,7 +3407,7 @@
             </a:avLst>
           </a:prstGeom>
           <a:solidFill>
-            <a:srgbClr val="50A0FF"/>
+            <a:srgbClr val="2B7FFF"/>
           </a:solidFill>
           <a:ln/>
         </p:spPr>
@@ -3451,7 +3451,7 @@
             </a:avLst>
           </a:prstGeom>
           <a:solidFill>
-            <a:srgbClr val="FF785A"/>
+            <a:srgbClr val="E85D3F"/>
           </a:solidFill>
           <a:ln/>
         </p:spPr>
@@ -3493,7 +3493,7 @@
             <a:avLst/>
           </a:prstGeom>
           <a:solidFill>
-            <a:srgbClr val="F2F2F2"/>
+            <a:srgbClr val="1C2A4A"/>
           </a:solidFill>
           <a:ln/>
         </p:spPr>
@@ -3525,7 +3525,7 @@
             <a:r>
               <a:rPr lang="en-US" sz="1200" dirty="0">
                 <a:solidFill>
-                  <a:srgbClr val="66718A"/>
+                  <a:srgbClr val="5B677F"/>
                 </a:solidFill>
                 <a:latin typeface="Arial" pitchFamily="34" charset="0"/>
                 <a:ea typeface="Arial" pitchFamily="34" charset="-122"/>
@@ -3603,7 +3603,7 @@
             <a:r>
               <a:rPr lang="en-US" sz="1400" dirty="0">
                 <a:solidFill>
-                  <a:srgbClr val="66718A"/>
+                  <a:srgbClr val="5B677F"/>
                 </a:solidFill>
                 <a:latin typeface="Arial" pitchFamily="34" charset="0"/>
                 <a:ea typeface="Arial" pitchFamily="34" charset="-122"/>
@@ -3704,7 +3704,7 @@
             <a:r>
               <a:rPr lang="en-US" sz="1400" dirty="0">
                 <a:solidFill>
-                  <a:srgbClr val="66718A"/>
+                  <a:srgbClr val="5B677F"/>
                 </a:solidFill>
                 <a:latin typeface="Arial" pitchFamily="34" charset="0"/>
                 <a:ea typeface="Arial" pitchFamily="34" charset="-122"/>
@@ -3805,7 +3805,7 @@
             <a:r>
               <a:rPr lang="en-US" sz="1400" dirty="0">
                 <a:solidFill>
-                  <a:srgbClr val="66718A"/>
+                  <a:srgbClr val="5B677F"/>
                 </a:solidFill>
                 <a:latin typeface="Arial" pitchFamily="34" charset="0"/>
                 <a:ea typeface="Arial" pitchFamily="34" charset="-122"/>
@@ -3906,7 +3906,7 @@
             <a:r>
               <a:rPr lang="en-US" sz="1400" dirty="0">
                 <a:solidFill>
-                  <a:srgbClr val="66718A"/>
+                  <a:srgbClr val="5B677F"/>
                 </a:solidFill>
                 <a:latin typeface="Arial" pitchFamily="34" charset="0"/>
                 <a:ea typeface="Arial" pitchFamily="34" charset="-122"/>
@@ -3977,7 +3977,7 @@
             <a:r>
               <a:rPr lang="en-US" sz="1200" b="1" spc="300" kern="0" dirty="0">
                 <a:solidFill>
-                  <a:srgbClr val="50A0FF"/>
+                  <a:srgbClr val="2B7FFF"/>
                 </a:solidFill>
                 <a:latin typeface="Arial" pitchFamily="34" charset="0"/>
                 <a:ea typeface="Arial" pitchFamily="34" charset="-122"/>
@@ -4077,7 +4077,7 @@
             <a:r>
               <a:rPr lang="en-US" sz="6600" b="1" dirty="0">
                 <a:solidFill>
-                  <a:srgbClr val="50A0FF"/>
+                  <a:srgbClr val="2B7FFF"/>
                 </a:solidFill>
                 <a:latin typeface="Arial" pitchFamily="34" charset="0"/>
                 <a:ea typeface="Arial" pitchFamily="34" charset="-122"/>
@@ -4155,7 +4155,7 @@
             <a:r>
               <a:rPr lang="en-US" sz="1250" dirty="0">
                 <a:solidFill>
-                  <a:srgbClr val="66718A"/>
+                  <a:srgbClr val="5B677F"/>
                 </a:solidFill>
                 <a:latin typeface="Arial" pitchFamily="34" charset="0"/>
                 <a:ea typeface="Arial" pitchFamily="34" charset="-122"/>
@@ -4216,7 +4216,7 @@
             <a:r>
               <a:rPr lang="en-US" sz="6600" b="1" dirty="0">
                 <a:solidFill>
-                  <a:srgbClr val="50A0FF"/>
+                  <a:srgbClr val="2B7FFF"/>
                 </a:solidFill>
                 <a:latin typeface="Arial" pitchFamily="34" charset="0"/>
                 <a:ea typeface="Arial" pitchFamily="34" charset="-122"/>
@@ -4294,7 +4294,7 @@
             <a:r>
               <a:rPr lang="en-US" sz="1250" dirty="0">
                 <a:solidFill>
-                  <a:srgbClr val="66718A"/>
+                  <a:srgbClr val="5B677F"/>
                 </a:solidFill>
                 <a:latin typeface="Arial" pitchFamily="34" charset="0"/>
                 <a:ea typeface="Arial" pitchFamily="34" charset="-122"/>
@@ -4355,7 +4355,7 @@
             <a:r>
               <a:rPr lang="en-US" sz="6600" b="1" dirty="0">
                 <a:solidFill>
-                  <a:srgbClr val="50A0FF"/>
+                  <a:srgbClr val="2B7FFF"/>
                 </a:solidFill>
                 <a:latin typeface="Arial" pitchFamily="34" charset="0"/>
                 <a:ea typeface="Arial" pitchFamily="34" charset="-122"/>
@@ -4433,7 +4433,7 @@
             <a:r>
               <a:rPr lang="en-US" sz="1250" dirty="0">
                 <a:solidFill>
-                  <a:srgbClr val="66718A"/>
+                  <a:srgbClr val="5B677F"/>
                 </a:solidFill>
                 <a:latin typeface="Arial" pitchFamily="34" charset="0"/>
                 <a:ea typeface="Arial" pitchFamily="34" charset="-122"/>
@@ -4494,7 +4494,7 @@
             <a:r>
               <a:rPr lang="en-US" sz="6600" b="1" dirty="0">
                 <a:solidFill>
-                  <a:srgbClr val="50A0FF"/>
+                  <a:srgbClr val="2B7FFF"/>
                 </a:solidFill>
                 <a:latin typeface="Arial" pitchFamily="34" charset="0"/>
                 <a:ea typeface="Arial" pitchFamily="34" charset="-122"/>
@@ -4572,7 +4572,7 @@
             <a:r>
               <a:rPr lang="en-US" sz="1250" dirty="0">
                 <a:solidFill>
-                  <a:srgbClr val="66718A"/>
+                  <a:srgbClr val="5B677F"/>
                 </a:solidFill>
                 <a:latin typeface="Arial" pitchFamily="34" charset="0"/>
                 <a:ea typeface="Arial" pitchFamily="34" charset="-122"/>
@@ -4650,7 +4650,7 @@
             <a:r>
               <a:rPr lang="en-US" sz="1100" dirty="0">
                 <a:solidFill>
-                  <a:srgbClr val="66718A"/>
+                  <a:srgbClr val="5B677F"/>
                 </a:solidFill>
                 <a:latin typeface="Arial" pitchFamily="34" charset="0"/>
                 <a:ea typeface="Arial" pitchFamily="34" charset="-122"/>
@@ -4721,7 +4721,7 @@
             <a:r>
               <a:rPr lang="en-US" sz="1200" b="1" spc="300" kern="0" dirty="0">
                 <a:solidFill>
-                  <a:srgbClr val="50A0FF"/>
+                  <a:srgbClr val="2B7FFF"/>
                 </a:solidFill>
                 <a:latin typeface="Arial" pitchFamily="34" charset="0"/>
                 <a:ea typeface="Arial" pitchFamily="34" charset="-122"/>
@@ -4823,7 +4823,7 @@
             <a:r>
               <a:rPr lang="en-US" sz="1200" i="1" dirty="0">
                 <a:solidFill>
-                  <a:srgbClr val="66718A"/>
+                  <a:srgbClr val="5B677F"/>
                 </a:solidFill>
                 <a:latin typeface="Arial" pitchFamily="34" charset="0"/>
                 <a:ea typeface="Arial" pitchFamily="34" charset="-122"/>
@@ -4986,7 +4986,7 @@
             <a:r>
               <a:rPr lang="en-US" sz="1600" i="1" dirty="0">
                 <a:solidFill>
-                  <a:srgbClr val="50A0FF"/>
+                  <a:srgbClr val="2B7FFF"/>
                 </a:solidFill>
                 <a:latin typeface="Arial" pitchFamily="34" charset="0"/>
                 <a:ea typeface="Arial" pitchFamily="34" charset="-122"/>
@@ -5025,7 +5025,7 @@
             <a:r>
               <a:rPr lang="en-US" sz="1100" dirty="0">
                 <a:solidFill>
-                  <a:srgbClr val="66718A"/>
+                  <a:srgbClr val="5B677F"/>
                 </a:solidFill>
                 <a:latin typeface="Arial" pitchFamily="34" charset="0"/>
                 <a:ea typeface="Arial" pitchFamily="34" charset="-122"/>
@@ -5096,7 +5096,7 @@
             <a:r>
               <a:rPr lang="en-US" sz="1200" b="1" spc="300" kern="0" dirty="0">
                 <a:solidFill>
-                  <a:srgbClr val="50A0FF"/>
+                  <a:srgbClr val="2B7FFF"/>
                 </a:solidFill>
                 <a:latin typeface="Arial" pitchFamily="34" charset="0"/>
                 <a:ea typeface="Arial" pitchFamily="34" charset="-122"/>
@@ -5212,7 +5212,7 @@
             <a:r>
               <a:rPr lang="en-US" sz="4000" b="1" dirty="0">
                 <a:solidFill>
-                  <a:srgbClr val="50A0FF"/>
+                  <a:srgbClr val="2B7FFF"/>
                 </a:solidFill>
                 <a:latin typeface="Arial" pitchFamily="34" charset="0"/>
                 <a:ea typeface="Arial" pitchFamily="34" charset="-122"/>
@@ -5329,7 +5329,7 @@
             <a:r>
               <a:rPr lang="en-US" sz="1100" dirty="0">
                 <a:solidFill>
-                  <a:srgbClr val="66718A"/>
+                  <a:srgbClr val="5B677F"/>
                 </a:solidFill>
                 <a:latin typeface="Arial" pitchFamily="34" charset="0"/>
                 <a:ea typeface="Arial" pitchFamily="34" charset="-122"/>
@@ -5400,7 +5400,7 @@
             <a:r>
               <a:rPr lang="en-US" sz="1200" b="1" spc="300" kern="0" dirty="0">
                 <a:solidFill>
-                  <a:srgbClr val="50A0FF"/>
+                  <a:srgbClr val="2B7FFF"/>
                 </a:solidFill>
                 <a:latin typeface="Arial" pitchFamily="34" charset="0"/>
                 <a:ea typeface="Arial" pitchFamily="34" charset="-122"/>
@@ -5502,7 +5502,7 @@
             <a:r>
               <a:rPr lang="en-US" sz="1300" i="1" dirty="0">
                 <a:solidFill>
-                  <a:srgbClr val="66718A"/>
+                  <a:srgbClr val="5B677F"/>
                 </a:solidFill>
                 <a:latin typeface="Arial" pitchFamily="34" charset="0"/>
                 <a:ea typeface="Arial" pitchFamily="34" charset="-122"/>
@@ -5580,7 +5580,7 @@
             <a:r>
               <a:rPr lang="en-US" sz="1100" dirty="0">
                 <a:solidFill>
-                  <a:srgbClr val="66718A"/>
+                  <a:srgbClr val="5B677F"/>
                 </a:solidFill>
                 <a:latin typeface="Arial" pitchFamily="34" charset="0"/>
                 <a:ea typeface="Arial" pitchFamily="34" charset="-122"/>
@@ -5651,7 +5651,7 @@
             <a:r>
               <a:rPr lang="en-US" sz="1200" b="1" spc="300" kern="0" dirty="0">
                 <a:solidFill>
-                  <a:srgbClr val="50A0FF"/>
+                  <a:srgbClr val="2B7FFF"/>
                 </a:solidFill>
                 <a:latin typeface="Arial" pitchFamily="34" charset="0"/>
                 <a:ea typeface="Arial" pitchFamily="34" charset="-122"/>
@@ -5753,7 +5753,7 @@
             <a:r>
               <a:rPr lang="en-US" sz="1200" i="1" dirty="0">
                 <a:solidFill>
-                  <a:srgbClr val="66718A"/>
+                  <a:srgbClr val="5B677F"/>
                 </a:solidFill>
                 <a:latin typeface="Arial" pitchFamily="34" charset="0"/>
                 <a:ea typeface="Arial" pitchFamily="34" charset="-122"/>
@@ -5814,7 +5814,7 @@
             <a:r>
               <a:rPr lang="en-US" sz="4000" b="1" dirty="0">
                 <a:solidFill>
-                  <a:srgbClr val="50A0FF"/>
+                  <a:srgbClr val="2B7FFF"/>
                 </a:solidFill>
                 <a:latin typeface="Arial" pitchFamily="34" charset="0"/>
                 <a:ea typeface="Arial" pitchFamily="34" charset="-122"/>
@@ -5955,7 +5955,7 @@
             <a:r>
               <a:rPr lang="en-US" sz="1100" dirty="0">
                 <a:solidFill>
-                  <a:srgbClr val="66718A"/>
+                  <a:srgbClr val="5B677F"/>
                 </a:solidFill>
                 <a:latin typeface="Arial" pitchFamily="34" charset="0"/>
                 <a:ea typeface="Arial" pitchFamily="34" charset="-122"/>
@@ -6026,7 +6026,7 @@
             <a:r>
               <a:rPr lang="en-US" sz="1200" b="1" spc="300" kern="0" dirty="0">
                 <a:solidFill>
-                  <a:srgbClr val="50A0FF"/>
+                  <a:srgbClr val="2B7FFF"/>
                 </a:solidFill>
                 <a:latin typeface="Arial" pitchFamily="34" charset="0"/>
                 <a:ea typeface="Arial" pitchFamily="34" charset="-122"/>
@@ -6244,7 +6244,7 @@
             <a:r>
               <a:rPr lang="en-US" sz="1100" dirty="0">
                 <a:solidFill>
-                  <a:srgbClr val="66718A"/>
+                  <a:srgbClr val="5B677F"/>
                 </a:solidFill>
                 <a:latin typeface="Arial" pitchFamily="34" charset="0"/>
                 <a:ea typeface="Arial" pitchFamily="34" charset="-122"/>
@@ -6270,7 +6270,7 @@
     <p:bg>
       <p:bgPr>
         <a:solidFill>
-          <a:srgbClr val="0A0F1E"/>
+          <a:srgbClr val="FFFFFF"/>
         </a:solidFill>
       </p:bgPr>
     </p:bg>
@@ -6315,7 +6315,7 @@
             <a:r>
               <a:rPr lang="en-US" sz="1400" b="1" spc="400" kern="0" dirty="0">
                 <a:solidFill>
-                  <a:srgbClr val="50A0FF"/>
+                  <a:srgbClr val="2B7FFF"/>
                 </a:solidFill>
                 <a:latin typeface="Arial" pitchFamily="34" charset="0"/>
                 <a:ea typeface="Arial" pitchFamily="34" charset="-122"/>
@@ -6354,7 +6354,7 @@
             <a:r>
               <a:rPr lang="en-US" sz="6400" b="1" dirty="0">
                 <a:solidFill>
-                  <a:srgbClr val="E8EEFA"/>
+                  <a:srgbClr val="182238"/>
                 </a:solidFill>
                 <a:latin typeface="Arial" pitchFamily="34" charset="0"/>
                 <a:ea typeface="Arial" pitchFamily="34" charset="-122"/>
@@ -6393,7 +6393,7 @@
             <a:r>
               <a:rPr lang="en-US" sz="2000" dirty="0">
                 <a:solidFill>
-                  <a:srgbClr val="8FA0C4"/>
+                  <a:srgbClr val="5B677F"/>
                 </a:solidFill>
                 <a:latin typeface="Arial" pitchFamily="34" charset="0"/>
                 <a:ea typeface="Arial" pitchFamily="34" charset="-122"/>
@@ -6432,7 +6432,7 @@
             <a:r>
               <a:rPr lang="en-US" sz="2000" b="1" dirty="0">
                 <a:solidFill>
-                  <a:srgbClr val="50A0FF"/>
+                  <a:srgbClr val="2B7FFF"/>
                 </a:solidFill>
                 <a:latin typeface="Arial" pitchFamily="34" charset="0"/>
                 <a:ea typeface="Arial" pitchFamily="34" charset="-122"/>
@@ -6471,7 +6471,7 @@
             <a:r>
               <a:rPr lang="en-US" sz="1350" dirty="0">
                 <a:solidFill>
-                  <a:srgbClr val="8FA0C4"/>
+                  <a:srgbClr val="5B677F"/>
                 </a:solidFill>
                 <a:latin typeface="Arial" pitchFamily="34" charset="0"/>
                 <a:ea typeface="Arial" pitchFamily="34" charset="-122"/>
@@ -6510,7 +6510,7 @@
             <a:r>
               <a:rPr lang="en-US" sz="2000" b="1" dirty="0">
                 <a:solidFill>
-                  <a:srgbClr val="50A0FF"/>
+                  <a:srgbClr val="2B7FFF"/>
                 </a:solidFill>
                 <a:latin typeface="Arial" pitchFamily="34" charset="0"/>
                 <a:ea typeface="Arial" pitchFamily="34" charset="-122"/>
@@ -6549,7 +6549,7 @@
             <a:r>
               <a:rPr lang="en-US" sz="1350" dirty="0">
                 <a:solidFill>
-                  <a:srgbClr val="8FA0C4"/>
+                  <a:srgbClr val="5B677F"/>
                 </a:solidFill>
                 <a:latin typeface="Arial" pitchFamily="34" charset="0"/>
                 <a:ea typeface="Arial" pitchFamily="34" charset="-122"/>
@@ -6588,7 +6588,7 @@
             <a:r>
               <a:rPr lang="en-US" sz="2000" b="1" dirty="0">
                 <a:solidFill>
-                  <a:srgbClr val="50A0FF"/>
+                  <a:srgbClr val="2B7FFF"/>
                 </a:solidFill>
                 <a:latin typeface="Arial" pitchFamily="34" charset="0"/>
                 <a:ea typeface="Arial" pitchFamily="34" charset="-122"/>
@@ -6627,7 +6627,7 @@
             <a:r>
               <a:rPr lang="en-US" sz="1350" dirty="0">
                 <a:solidFill>
-                  <a:srgbClr val="8FA0C4"/>
+                  <a:srgbClr val="5B677F"/>
                 </a:solidFill>
                 <a:latin typeface="Arial" pitchFamily="34" charset="0"/>
                 <a:ea typeface="Arial" pitchFamily="34" charset="-122"/>

--- a/report/marl_pong_presentation.pptx
+++ b/report/marl_pong_presentation.pptx
@@ -142,7 +142,7 @@
                 </a:solidFill>
                 <a:latin typeface="Arial"/>
               </a:rPr>
-              <a:t>Team A win rate (blue team), 60 episodes per bar</a:t>
+              <a:t>Win rates, 60 greedy episodes per opponent (the rest are draws)</a:t>
             </a:r>
           </a:p>
         </c:rich>
@@ -166,7 +166,7 @@
               <c:strCache>
                 <c:ptCount val="1"/>
                 <c:pt idx="0">
-                  <c:v>2v2 @ 1M</c:v>
+                  <c:v>Team A win</c:v>
                 </c:pt>
               </c:strCache>
             </c:strRef>
@@ -204,18 +204,21 @@
           </c:dLbls>
           <c:cat>
             <c:multiLvlStrRef>
-              <c:f>Sheet1!$A$2:$A$4</c:f>
+              <c:f>Sheet1!$A$2:$A$5</c:f>
               <c:multiLvlStrCache>
-                <c:ptCount val="3"/>
+                <c:ptCount val="4"/>
                 <c:lvl>
                   <c:pt idx="0">
                     <c:v>vs random</c:v>
                   </c:pt>
                   <c:pt idx="1">
+                    <c:v>vs reactive tracker</c:v>
+                  </c:pt>
+                  <c:pt idx="2">
                     <c:v>vs self-play</c:v>
                   </c:pt>
-                  <c:pt idx="2">
-                    <c:v>vs scripted tracker</c:v>
+                  <c:pt idx="3">
+                    <c:v>vs predictive tracker</c:v>
                   </c:pt>
                 </c:lvl>
               </c:multiLvlStrCache>
@@ -223,18 +226,21 @@
           </c:cat>
           <c:val>
             <c:numRef>
-              <c:f>Sheet1!$B$2:$B$4</c:f>
+              <c:f>Sheet1!$B$2:$B$5</c:f>
               <c:numCache>
                 <c:formatCode>General</c:formatCode>
-                <c:ptCount val="3"/>
+                <c:ptCount val="4"/>
                 <c:pt idx="0">
-                  <c:v>0.68</c:v>
+                  <c:v>1</c:v>
                 </c:pt>
                 <c:pt idx="1">
-                  <c:v>0.43</c:v>
+                  <c:v>0.63</c:v>
                 </c:pt>
                 <c:pt idx="2">
-                  <c:v>0.02</c:v>
+                  <c:v>0.53</c:v>
+                </c:pt>
+                <c:pt idx="3">
+                  <c:v>0</c:v>
                 </c:pt>
               </c:numCache>
             </c:numRef>
@@ -249,14 +255,14 @@
               <c:strCache>
                 <c:ptCount val="1"/>
                 <c:pt idx="0">
-                  <c:v>1v1 @ 300k</c:v>
+                  <c:v>Team B win</c:v>
                 </c:pt>
               </c:strCache>
             </c:strRef>
           </c:tx>
           <c:spPr>
             <a:solidFill>
-              <a:srgbClr val="8B98B3"/>
+              <a:srgbClr val="E85D3F"/>
             </a:solidFill>
             <a:effectLst/>
           </c:spPr>
@@ -287,18 +293,21 @@
           </c:dLbls>
           <c:cat>
             <c:multiLvlStrRef>
-              <c:f>Sheet1!$A$2:$A$4</c:f>
+              <c:f>Sheet1!$A$2:$A$5</c:f>
               <c:multiLvlStrCache>
-                <c:ptCount val="3"/>
+                <c:ptCount val="4"/>
                 <c:lvl>
                   <c:pt idx="0">
                     <c:v>vs random</c:v>
                   </c:pt>
                   <c:pt idx="1">
+                    <c:v>vs reactive tracker</c:v>
+                  </c:pt>
+                  <c:pt idx="2">
                     <c:v>vs self-play</c:v>
                   </c:pt>
-                  <c:pt idx="2">
-                    <c:v>vs scripted tracker</c:v>
+                  <c:pt idx="3">
+                    <c:v>vs predictive tracker</c:v>
                   </c:pt>
                 </c:lvl>
               </c:multiLvlStrCache>
@@ -306,18 +315,21 @@
           </c:cat>
           <c:val>
             <c:numRef>
-              <c:f>Sheet1!$C$2:$C$4</c:f>
+              <c:f>Sheet1!$C$2:$C$5</c:f>
               <c:numCache>
                 <c:formatCode>General</c:formatCode>
-                <c:ptCount val="3"/>
+                <c:ptCount val="4"/>
                 <c:pt idx="0">
-                  <c:v>0.48</c:v>
+                  <c:v>0</c:v>
                 </c:pt>
                 <c:pt idx="1">
-                  <c:v>0.39</c:v>
+                  <c:v>0.07</c:v>
                 </c:pt>
                 <c:pt idx="2">
-                  <c:v>0</c:v>
+                  <c:v>0.03</c:v>
+                </c:pt>
+                <c:pt idx="3">
+                  <c:v>0.13</c:v>
                 </c:pt>
               </c:numCache>
             </c:numRef>
@@ -517,7 +529,7 @@
                 </a:solidFill>
                 <a:latin typeface="Arial"/>
               </a:rPr>
-              <a:t>Self-play win rates, 2v2 @ 1M (60 episodes)</a:t>
+              <a:t>Team A win rate, same configuration, growing budget</a:t>
             </a:r>
           </a:p>
         </c:rich>
@@ -541,7 +553,90 @@
               <c:strCache>
                 <c:ptCount val="1"/>
                 <c:pt idx="0">
-                  <c:v>Team A (blue)</c:v>
+                  <c:v>vs random</c:v>
+                </c:pt>
+              </c:strCache>
+            </c:strRef>
+          </c:tx>
+          <c:spPr>
+            <a:solidFill>
+              <a:srgbClr val="8B98B3"/>
+            </a:solidFill>
+            <a:effectLst/>
+          </c:spPr>
+          <c:invertIfNegative val="0"/>
+          <c:dLbls>
+            <c:numFmt formatCode="0.00" sourceLinked="0"/>
+            <c:txPr>
+              <a:bodyPr/>
+              <a:lstStyle/>
+              <a:p>
+                <a:pPr>
+                  <a:defRPr b="0" i="0" strike="noStrike" sz="1200" u="none">
+                    <a:solidFill>
+                      <a:srgbClr val="182238"/>
+                    </a:solidFill>
+                    <a:latin typeface="Arial"/>
+                  </a:defRPr>
+                </a:pPr>
+              </a:p>
+            </c:txPr>
+            <c:showLegendKey val="0"/>
+            <c:showVal val="1"/>
+            <c:showCatName val="0"/>
+            <c:showSerName val="0"/>
+            <c:showPercent val="0"/>
+            <c:showBubbleSize val="0"/>
+            <c:showLeaderLines val="0"/>
+          </c:dLbls>
+          <c:cat>
+            <c:multiLvlStrRef>
+              <c:f>Sheet1!$A$2:$A$4</c:f>
+              <c:multiLvlStrCache>
+                <c:ptCount val="3"/>
+                <c:lvl>
+                  <c:pt idx="0">
+                    <c:v>1M (1 seed)</c:v>
+                  </c:pt>
+                  <c:pt idx="1">
+                    <c:v>3M (3-seed mean)</c:v>
+                  </c:pt>
+                  <c:pt idx="2">
+                    <c:v>5M (s1_5M)</c:v>
+                  </c:pt>
+                </c:lvl>
+              </c:multiLvlStrCache>
+            </c:multiLvlStrRef>
+          </c:cat>
+          <c:val>
+            <c:numRef>
+              <c:f>Sheet1!$B$2:$B$4</c:f>
+              <c:numCache>
+                <c:formatCode>General</c:formatCode>
+                <c:ptCount val="3"/>
+                <c:pt idx="0">
+                  <c:v>0.97</c:v>
+                </c:pt>
+                <c:pt idx="1">
+                  <c:v>0.98</c:v>
+                </c:pt>
+                <c:pt idx="2">
+                  <c:v>1</c:v>
+                </c:pt>
+              </c:numCache>
+            </c:numRef>
+          </c:val>
+        </c:ser>
+        <c:ser>
+          <c:idx val="1"/>
+          <c:order val="1"/>
+          <c:tx>
+            <c:strRef>
+              <c:f>Sheet1!$C$1</c:f>
+              <c:strCache>
+                <c:ptCount val="1"/>
+                <c:pt idx="0">
+                  <c:v>vs reactive tracker</c:v>
                 </c:pt>
               </c:strCache>
             </c:strRef>
@@ -584,96 +679,13 @@
                 <c:ptCount val="3"/>
                 <c:lvl>
                   <c:pt idx="0">
-                    <c:v>seed 0</c:v>
+                    <c:v>1M (1 seed)</c:v>
                   </c:pt>
                   <c:pt idx="1">
-                    <c:v>seed 1</c:v>
+                    <c:v>3M (3-seed mean)</c:v>
                   </c:pt>
                   <c:pt idx="2">
-                    <c:v>seed 2</c:v>
-                  </c:pt>
-                </c:lvl>
-              </c:multiLvlStrCache>
-            </c:multiLvlStrRef>
-          </c:cat>
-          <c:val>
-            <c:numRef>
-              <c:f>Sheet1!$B$2:$B$4</c:f>
-              <c:numCache>
-                <c:formatCode>General</c:formatCode>
-                <c:ptCount val="3"/>
-                <c:pt idx="0">
-                  <c:v>0.37</c:v>
-                </c:pt>
-                <c:pt idx="1">
-                  <c:v>0.67</c:v>
-                </c:pt>
-                <c:pt idx="2">
-                  <c:v>0.25</c:v>
-                </c:pt>
-              </c:numCache>
-            </c:numRef>
-          </c:val>
-        </c:ser>
-        <c:ser>
-          <c:idx val="1"/>
-          <c:order val="1"/>
-          <c:tx>
-            <c:strRef>
-              <c:f>Sheet1!$C$1</c:f>
-              <c:strCache>
-                <c:ptCount val="1"/>
-                <c:pt idx="0">
-                  <c:v>Team B (red)</c:v>
-                </c:pt>
-              </c:strCache>
-            </c:strRef>
-          </c:tx>
-          <c:spPr>
-            <a:solidFill>
-              <a:srgbClr val="E85D3F"/>
-            </a:solidFill>
-            <a:effectLst/>
-          </c:spPr>
-          <c:invertIfNegative val="0"/>
-          <c:dLbls>
-            <c:numFmt formatCode="0.00" sourceLinked="0"/>
-            <c:txPr>
-              <a:bodyPr/>
-              <a:lstStyle/>
-              <a:p>
-                <a:pPr>
-                  <a:defRPr b="0" i="0" strike="noStrike" sz="1200" u="none">
-                    <a:solidFill>
-                      <a:srgbClr val="182238"/>
-                    </a:solidFill>
-                    <a:latin typeface="Arial"/>
-                  </a:defRPr>
-                </a:pPr>
-              </a:p>
-            </c:txPr>
-            <c:showLegendKey val="0"/>
-            <c:showVal val="1"/>
-            <c:showCatName val="0"/>
-            <c:showSerName val="0"/>
-            <c:showPercent val="0"/>
-            <c:showBubbleSize val="0"/>
-            <c:showLeaderLines val="0"/>
-          </c:dLbls>
-          <c:cat>
-            <c:multiLvlStrRef>
-              <c:f>Sheet1!$A$2:$A$4</c:f>
-              <c:multiLvlStrCache>
-                <c:ptCount val="3"/>
-                <c:lvl>
-                  <c:pt idx="0">
-                    <c:v>seed 0</c:v>
-                  </c:pt>
-                  <c:pt idx="1">
-                    <c:v>seed 1</c:v>
-                  </c:pt>
-                  <c:pt idx="2">
-                    <c:v>seed 2</c:v>
+                    <c:v>5M (s1_5M)</c:v>
                   </c:pt>
                 </c:lvl>
               </c:multiLvlStrCache>
@@ -686,13 +698,13 @@
                 <c:formatCode>General</c:formatCode>
                 <c:ptCount val="3"/>
                 <c:pt idx="0">
-                  <c:v>0.58</c:v>
+                  <c:v>0.12</c:v>
                 </c:pt>
                 <c:pt idx="1">
-                  <c:v>0.08</c:v>
+                  <c:v>0.24</c:v>
                 </c:pt>
                 <c:pt idx="2">
-                  <c:v>0.7</c:v>
+                  <c:v>0.63</c:v>
                 </c:pt>
               </c:numCache>
             </c:numRef>
@@ -1261,7 +1273,7 @@
           <a:p>
             <a:r>
               <a:rPr lang="en-US" dirty="0"/>
-              <a:t>Open with the question, then play the footage. Frame: can teammates coordinate with only local state, teammate state, and a shared win/lose signal? Li et al. 2025 supplies the framing: non-stationarity and credit assignment.</a:t>
+              <a:t>Open with the question, then play the footage (results/videos/). Frame: can teammates coordinate with only local state, teammate state, and a shared win/lose signal? Li et al. 2025 supplies the framing: non-stationarity and credit assignment. The clips use seeds where points are scored; they illustrate, the tables are the evidence.</a:t>
             </a:r>
             <a:endParaRPr lang="en-US" dirty="0"/>
           </a:p>
@@ -1349,7 +1361,7 @@
           <a:p>
             <a:r>
               <a:rPr lang="en-US" dirty="0"/>
-              <a:t>Close on future work: frozen-opponent condition first, then more seeds. Offer the repo for anyone who wants to rerun the eval.</a:t>
+              <a:t>Close on future work: more seeds at 5M first, then the frozen-opponent condition. Offer the repo for anyone who wants to rerun the eval.</a:t>
             </a:r>
             <a:endParaRPr lang="en-US" dirty="0"/>
           </a:p>
@@ -1437,7 +1449,7 @@
           <a:p>
             <a:r>
               <a:rPr lang="en-US" dirty="0"/>
-              <a:t>Stress the design constraint: excluding opponent observations is deliberate — it keeps the research question about local+teammate coordination. The overlap band is where both teammates can roam; no fixed regions are assigned.</a:t>
+              <a:t>Stress the design constraint: excluding opponent observations is deliberate; it keeps the research question about local+teammate coordination. Overlapping teammates resolve a contact by closest paddle, so neither has a built-in priority in the shared band.</a:t>
             </a:r>
             <a:endParaRPr lang="en-US" dirty="0"/>
           </a:p>
@@ -1525,7 +1537,7 @@
           <a:p>
             <a:r>
               <a:rPr lang="en-US" dirty="0"/>
-              <a:t>If asked about MLflow/SB3 deviations: custom PPO was TASK.md option (b); CSV logs replace MLflow; both documented in report section 2.</a:t>
+              <a:t>If asked about MLflow/SB3 deviations: custom PPO was TASK.md option (b); CSV logs replace MLflow. Be upfront that the showcased run is one seed selected from several candidates; slide 8 shows the cross-seed picture.</a:t>
             </a:r>
             <a:endParaRPr lang="en-US" dirty="0"/>
           </a:p>
@@ -1613,7 +1625,7 @@
           <a:p>
             <a:r>
               <a:rPr lang="en-US" dirty="0"/>
-              <a:t>This is the non-stationarity challenge from Li et al. demonstrated, not just cited. Nobody converged; the optimization target keeps moving. Present the decline at the end honestly: an arms race, not undertraining.</a:t>
+              <a:t>Non-stationarity from Li et al. shown, not just cited: each team's improvement is the other team's environment change. This run does settle, with team A ahead.</a:t>
             </a:r>
             <a:endParaRPr lang="en-US" dirty="0"/>
           </a:p>
@@ -1701,7 +1713,7 @@
           <a:p>
             <a:r>
               <a:rPr lang="en-US" dirty="0"/>
-              <a:t>Calibrated honesty: PPO learned something real (0.68 vs random) but far from scripted-perfect. The spread matters: one seed wins ~90%, another ~50%. Do not oversell.</a:t>
+              <a:t>Calibrated honesty: real skill (perfect vs random, majority vs the reactive tracker), but a projected-intercept controller still defends better. Self-play is lopsided: A 0.53, B 0.03.</a:t>
             </a:r>
             <a:endParaRPr lang="en-US" dirty="0"/>
           </a:p>
@@ -1789,7 +1801,7 @@
           <a:p>
             <a:r>
               <a:rPr lang="en-US" dirty="0"/>
-              <a:t>This is the centerpiece: the actual research question answered visually. Structure is unambiguous in the heatmaps. Seeds 1 and 2 show different partitions — the deck's next slides quantify that.</a:t>
+              <a:t>The occupancy structure is clear, but occupancy alone is not coordination; the next slide shows who actually returns the ball where.</a:t>
             </a:r>
             <a:endParaRPr lang="en-US" dirty="0"/>
           </a:p>
@@ -1877,7 +1889,7 @@
           <a:p>
             <a:r>
               <a:rPr lang="en-US" dirty="0"/>
-              <a:t>The metric went the 'wrong' way and that is the interesting part: rising overlap reflects vigorous shared chasing on top of stable home bands. Presenting this honestly beats pretending it trended down.</a:t>
+              <a:t>This is the functional evidence: both paddles can reach the middle band, and the team allocates it unevenly but consistently across all four evaluation opponents. Discount the outer bands; geometry decides those.</a:t>
             </a:r>
             <a:endParaRPr lang="en-US" dirty="0"/>
           </a:p>
@@ -1965,7 +1977,7 @@
           <a:p>
             <a:r>
               <a:rPr lang="en-US" dirty="0"/>
-              <a:t>This explains the footage: the recorded clip shows blue winning 4-1, but across 60 episodes red wins that seed 0.58-0.37. One match is anecdote; the table is the finding. Seed 1 is where blue genuinely dominates.</a:t>
+              <a:t>Be explicit: s1_5M is the best observed run, selected after comparison. The 3-seed 3M run is the honest cross-seed estimate; the trend with budget is the robust part.</a:t>
             </a:r>
             <a:endParaRPr lang="en-US" dirty="0"/>
           </a:p>
@@ -2053,7 +2065,7 @@
           <a:p>
             <a:r>
               <a:rPr lang="en-US" dirty="0"/>
-              <a:t>Say the verdict sentence exactly like this, then stop. This is the slide to linger on.</a:t>
+              <a:t>Say the verdict sentence, then stop. This is the slide to linger on.</a:t>
             </a:r>
             <a:endParaRPr lang="en-US" dirty="0"/>
           </a:p>
@@ -2773,7 +2785,7 @@
                 <a:ea typeface="Arial" pitchFamily="34" charset="-122"/>
                 <a:cs typeface="Arial" pitchFamily="34" charset="-120"/>
               </a:rPr>
-              <a:t>Results: 3 seeds, 1M steps per 2v2 run · 60-episode deterministic eval · report/report.md</a:t>
+              <a:t>Reported run s1_5M: 5M self-play steps, seed 0 · 60-episode deterministic eval per opponent · report/report.md</a:t>
             </a:r>
             <a:endParaRPr lang="en-US" sz="1200" dirty="0"/>
           </a:p>
@@ -2922,7 +2934,7 @@
                 <a:ea typeface="Arial" pitchFamily="34" charset="-122"/>
                 <a:cs typeface="Arial" pitchFamily="34" charset="-120"/>
               </a:rPr>
-              <a:t>3 seeds</a:t>
+              <a:t>Single seed</a:t>
             </a:r>
             <a:endParaRPr lang="en-US" sz="1800" dirty="0"/>
           </a:p>
@@ -2961,7 +2973,7 @@
                 <a:ea typeface="Arial" pitchFamily="34" charset="-122"/>
                 <a:cs typeface="Arial" pitchFamily="34" charset="-120"/>
               </a:rPr>
-              <a:t>the specialization-success correlation needs more runs to be more than suggestive</a:t>
+              <a:t>s1_5M was selected from several runs; train seeds 1–2 at 5M to make it a protocol-grade claim</a:t>
             </a:r>
             <a:endParaRPr lang="en-US" sz="1500" dirty="0"/>
           </a:p>
@@ -3023,7 +3035,7 @@
                 <a:ea typeface="Arial" pitchFamily="34" charset="-122"/>
                 <a:cs typeface="Arial" pitchFamily="34" charset="-120"/>
               </a:rPr>
-              <a:t>Unswept overlap</a:t>
+              <a:t>Step-capped games</a:t>
             </a:r>
             <a:endParaRPr lang="en-US" sz="1800" dirty="0"/>
           </a:p>
@@ -3062,7 +3074,7 @@
                 <a:ea typeface="Arial" pitchFamily="34" charset="-122"/>
                 <a:cs typeface="Arial" pitchFamily="34" charset="-120"/>
               </a:rPr>
-              <a:t>paddle overlap stayed at its 0.4 default — the frozen-before-training sweep was never run</a:t>
+              <a:t>matches against trackers never reach 5 points; wins are low-scoring leads at the cap</a:t>
             </a:r>
             <a:endParaRPr lang="en-US" sz="1500" dirty="0"/>
           </a:p>
@@ -3163,7 +3175,7 @@
                 <a:ea typeface="Arial" pitchFamily="34" charset="-122"/>
                 <a:cs typeface="Arial" pitchFamily="34" charset="-120"/>
               </a:rPr>
-              <a:t>skill improvement and opponent drift remain entangled — the one experiment that would disentangle them</a:t>
+              <a:t>skill growth and opponent drift remain entangled; this is the experiment that would separate them</a:t>
             </a:r>
             <a:endParaRPr lang="en-US" sz="1500" dirty="0"/>
           </a:p>
@@ -3202,7 +3214,7 @@
                 <a:ea typeface="Arial" pitchFamily="34" charset="-122"/>
                 <a:cs typeface="Arial" pitchFamily="34" charset="-120"/>
               </a:rPr>
-              <a:t>Repo: marl-pong — checkpoints, logs, eval records, analysis code, and report/report.md are all committed</a:t>
+              <a:t>Repo: marl-pong — checkpoint, logs, eval records, analysis code, and report/report.md are all committed</a:t>
             </a:r>
             <a:endParaRPr lang="en-US" sz="1200" dirty="0"/>
           </a:p>
@@ -3531,7 +3543,7 @@
                 <a:ea typeface="Arial" pitchFamily="34" charset="-122"/>
                 <a:cs typeface="Arial" pitchFamily="34" charset="-120"/>
               </a:rPr>
-              <a:t>Overlapping vertical ranges — nobody owns a region</a:t>
+              <a:t>Overlapping vertical ranges — nobody owns the middle</a:t>
             </a:r>
             <a:endParaRPr lang="en-US" sz="1200" dirty="0"/>
           </a:p>
@@ -3710,7 +3722,7 @@
                 <a:ea typeface="Arial" pitchFamily="34" charset="-122"/>
                 <a:cs typeface="Arial" pitchFamily="34" charset="-120"/>
               </a:rPr>
-              <a:t>+1 / -1 per point, identical signal to both teammates</a:t>
+              <a:t>+1 / -1 per point, identical signal to both teammates, no hit shaping</a:t>
             </a:r>
             <a:endParaRPr lang="en-US" sz="1400" dirty="0"/>
           </a:p>
@@ -3912,7 +3924,7 @@
                 <a:ea typeface="Arial" pitchFamily="34" charset="-122"/>
                 <a:cs typeface="Arial" pitchFamily="34" charset="-120"/>
               </a:rPr>
-              <a:t>separate 64×64 actor-critic MLPs, CPU-only; no shared critic, no parameter sharing</a:t>
+              <a:t>separate 64×64 actor and critic MLPs per paddle, CPU-only; no shared critic, no parameter sharing</a:t>
             </a:r>
             <a:endParaRPr lang="en-US" sz="1400" dirty="0"/>
           </a:p>
@@ -4022,7 +4034,7 @@
                 <a:ea typeface="Arial" pitchFamily="34" charset="-122"/>
                 <a:cs typeface="Arial" pitchFamily="34" charset="-120"/>
               </a:rPr>
-              <a:t>Small enough to run, honest enough to trust</a:t>
+              <a:t>Calibrate first, then train, then evaluate greedily</a:t>
             </a:r>
             <a:endParaRPr lang="en-US" sz="3200" dirty="0"/>
           </a:p>
@@ -4083,7 +4095,7 @@
                 <a:ea typeface="Arial" pitchFamily="34" charset="-122"/>
                 <a:cs typeface="Arial" pitchFamily="34" charset="-120"/>
               </a:rPr>
-              <a:t>4</a:t>
+              <a:t>0.15</a:t>
             </a:r>
             <a:endParaRPr lang="en-US" sz="6600" dirty="0"/>
           </a:p>
@@ -4122,7 +4134,7 @@
                 <a:ea typeface="Arial" pitchFamily="34" charset="-122"/>
                 <a:cs typeface="Arial" pitchFamily="34" charset="-120"/>
               </a:rPr>
-              <a:t>independent PPO learners</a:t>
+              <a:t>frozen paddle overlap</a:t>
             </a:r>
             <a:endParaRPr lang="en-US" sz="1600" dirty="0"/>
           </a:p>
@@ -4161,7 +4173,7 @@
                 <a:ea typeface="Arial" pitchFamily="34" charset="-122"/>
                 <a:cs typeface="Arial" pitchFamily="34" charset="-120"/>
               </a:rPr>
-              <a:t>64×64 actor-critic MLPs, one per paddle, CPU</a:t>
+              <a:t>picked with scripted agents only, before any PPO run (+ ball speed ×1.15)</a:t>
             </a:r>
             <a:endParaRPr lang="en-US" sz="1250" dirty="0"/>
           </a:p>
@@ -4222,7 +4234,7 @@
                 <a:ea typeface="Arial" pitchFamily="34" charset="-122"/>
                 <a:cs typeface="Arial" pitchFamily="34" charset="-120"/>
               </a:rPr>
-              <a:t>3</a:t>
+              <a:t>4</a:t>
             </a:r>
             <a:endParaRPr lang="en-US" sz="6600" dirty="0"/>
           </a:p>
@@ -4261,7 +4273,7 @@
                 <a:ea typeface="Arial" pitchFamily="34" charset="-122"/>
                 <a:cs typeface="Arial" pitchFamily="34" charset="-120"/>
               </a:rPr>
-              <a:t>seeds per condition</a:t>
+              <a:t>independent PPO learners</a:t>
             </a:r>
             <a:endParaRPr lang="en-US" sz="1600" dirty="0"/>
           </a:p>
@@ -4300,7 +4312,7 @@
                 <a:ea typeface="Arial" pitchFamily="34" charset="-122"/>
                 <a:cs typeface="Arial" pitchFamily="34" charset="-120"/>
               </a:rPr>
-              <a:t>fresh initialization every run — no warm starts</a:t>
+              <a:t>rollout 4096 · 6 epochs · minibatch 512 · λ 0.99 · entropy 0.01→0.001</a:t>
             </a:r>
             <a:endParaRPr lang="en-US" sz="1250" dirty="0"/>
           </a:p>
@@ -4361,7 +4373,7 @@
                 <a:ea typeface="Arial" pitchFamily="34" charset="-122"/>
                 <a:cs typeface="Arial" pitchFamily="34" charset="-120"/>
               </a:rPr>
-              <a:t>1M</a:t>
+              <a:t>5M</a:t>
             </a:r>
             <a:endParaRPr lang="en-US" sz="6600" dirty="0"/>
           </a:p>
@@ -4400,7 +4412,7 @@
                 <a:ea typeface="Arial" pitchFamily="34" charset="-122"/>
                 <a:cs typeface="Arial" pitchFamily="34" charset="-120"/>
               </a:rPr>
-              <a:t>steps per 2v2 run</a:t>
+              <a:t>self-play steps</a:t>
             </a:r>
             <a:endParaRPr lang="en-US" sz="1600" dirty="0"/>
           </a:p>
@@ -4439,7 +4451,7 @@
                 <a:ea typeface="Arial" pitchFamily="34" charset="-122"/>
                 <a:cs typeface="Arial" pitchFamily="34" charset="-120"/>
               </a:rPr>
-              <a:t>1v1 sanity baseline at 300k; all runs logged per iteration</a:t>
+              <a:t>seed 0; chosen from a hyperparameter sweep and longer 3-seed runs</a:t>
             </a:r>
             <a:endParaRPr lang="en-US" sz="1250" dirty="0"/>
           </a:p>
@@ -4539,7 +4551,7 @@
                 <a:ea typeface="Arial" pitchFamily="34" charset="-122"/>
                 <a:cs typeface="Arial" pitchFamily="34" charset="-120"/>
               </a:rPr>
-              <a:t>eval episodes × 3 opponents</a:t>
+              <a:t>eval episodes × 4 opponents</a:t>
             </a:r>
             <a:endParaRPr lang="en-US" sz="1600" dirty="0"/>
           </a:p>
@@ -4578,7 +4590,7 @@
                 <a:ea typeface="Arial" pitchFamily="34" charset="-122"/>
                 <a:cs typeface="Arial" pitchFamily="34" charset="-120"/>
               </a:rPr>
-              <a:t>deterministic greedy play vs self, scripted tracker, random</a:t>
+              <a:t>greedy play vs self-play, random, reactive and predictive trackers</a:t>
             </a:r>
             <a:endParaRPr lang="en-US" sz="1250" dirty="0"/>
           </a:p>
@@ -4617,7 +4629,7 @@
                 <a:ea typeface="Arial" pitchFamily="34" charset="-122"/>
                 <a:cs typeface="Arial" pitchFamily="34" charset="-120"/>
               </a:rPr>
-              <a:t>Every number in this deck comes from committed checkpoints, logs, and eval records — reproducible from the repo.</a:t>
+              <a:t>Every number in this deck comes from the committed checkpoint, log, and eval records — reproducible from the repo.</a:t>
             </a:r>
             <a:endParaRPr lang="en-US" sz="1500" dirty="0"/>
           </a:p>
@@ -4656,7 +4668,7 @@
                 <a:ea typeface="Arial" pitchFamily="34" charset="-122"/>
                 <a:cs typeface="Arial" pitchFamily="34" charset="-120"/>
               </a:rPr>
-              <a:t>Source: results/models/, results/logs/, results/eval_*.json (marl-pong repo)</a:t>
+              <a:t>Source: results/models/s1_5M/run_config.json, results/calibration_v2.json, results/eval_s1_5M*.json</a:t>
             </a:r>
             <a:endParaRPr lang="en-US" sz="1100" dirty="0"/>
           </a:p>
@@ -4766,7 +4778,7 @@
                 <a:ea typeface="Arial" pitchFamily="34" charset="-122"/>
                 <a:cs typeface="Arial" pitchFamily="34" charset="-120"/>
               </a:rPr>
-              <a:t>Learning is a wave, not a trend</a:t>
+              <a:t>The opponent is the environment</a:t>
             </a:r>
             <a:endParaRPr lang="en-US" sz="3200" dirty="0"/>
           </a:p>
@@ -4774,7 +4786,7 @@
       </p:sp>
       <p:pic>
         <p:nvPicPr>
-          <p:cNvPr id="4" name="Image 0" descr="results/plots/curves_2v2.png">    </p:cNvPr>
+          <p:cNvPr id="4" name="Image 0" descr="results/plots/curves_mean_return_A.png">    </p:cNvPr>
           <p:cNvPicPr>
             <a:picLocks noChangeAspect="1"/>
           </p:cNvPicPr>
@@ -4829,7 +4841,7 @@
                 <a:ea typeface="Arial" pitchFamily="34" charset="-122"/>
                 <a:cs typeface="Arial" pitchFamily="34" charset="-120"/>
               </a:rPr>
-              <a:t>Self-play team A return, smoothed — one curve per seed</a:t>
+              <a:t>Self-play team A return (51-iteration rolling mean)</a:t>
             </a:r>
             <a:endParaRPr lang="en-US" sz="1200" dirty="0"/>
           </a:p>
@@ -4868,7 +4880,7 @@
                 <a:ea typeface="Arial" pitchFamily="34" charset="-122"/>
                 <a:cs typeface="Arial" pitchFamily="34" charset="-120"/>
               </a:rPr>
-              <a:t>Oscillation, not convergence</a:t>
+              <a:t>Collapse, recover, settle</a:t>
             </a:r>
             <a:endParaRPr lang="en-US" sz="2400" dirty="0"/>
           </a:p>
@@ -4911,7 +4923,7 @@
                 <a:ea typeface="Arial" pitchFamily="34" charset="-122"/>
                 <a:cs typeface="Arial" pitchFamily="34" charset="-120"/>
               </a:rPr>
-              <a:t>Dominance swings in ~300k-step waves — each team's improvement is the other's environment change</a:t>
+              <a:t>Team B learns to return first: team A's return dives to −3.4 by ~400k steps</a:t>
             </a:r>
             <a:endParaRPr lang="en-US" sz="1500" dirty="0"/>
           </a:p>
@@ -4932,7 +4944,7 @@
                 <a:ea typeface="Arial" pitchFamily="34" charset="-122"/>
                 <a:cs typeface="Arial" pitchFamily="34" charset="-120"/>
               </a:rPr>
-              <a:t>All three seeds decline together after ~800k steps</a:t>
+              <a:t>Team A catches up and is positive again by ~1.2M; peaks near +1 at 2.5M</a:t>
             </a:r>
             <a:endParaRPr lang="en-US" sz="1500" dirty="0"/>
           </a:p>
@@ -4953,7 +4965,7 @@
                 <a:ea typeface="Arial" pitchFamily="34" charset="-122"/>
                 <a:cs typeface="Arial" pitchFamily="34" charset="-120"/>
               </a:rPr>
-              <a:t>Which team leads at 1M is a coin flip: seed 1 → A, seeds 0/2 → B</a:t>
+              <a:t>Last 2M steps settle in a +0.3 to +0.5 band — stable, but not symmetric</a:t>
             </a:r>
             <a:endParaRPr lang="en-US" sz="1500" dirty="0"/>
           </a:p>
@@ -4962,45 +4974,6 @@
       <p:sp>
         <p:nvSpPr>
           <p:cNvPr id="8" name="Text 5"/>
-          <p:cNvSpPr/>
-          <p:nvPr/>
-        </p:nvSpPr>
-        <p:spPr>
-          <a:xfrm>
-            <a:off x="7223760" y="4846320"/>
-            <a:ext cx="4572000" cy="457200"/>
-          </a:xfrm>
-          <a:prstGeom prst="rect">
-            <a:avLst/>
-          </a:prstGeom>
-          <a:noFill/>
-          <a:ln/>
-        </p:spPr>
-        <p:txBody>
-          <a:bodyPr wrap="square" lIns="0" tIns="0" rIns="0" bIns="0" rtlCol="0" anchor="ctr"/>
-          <a:lstStyle/>
-          <a:p>
-            <a:pPr indent="0" marL="0">
-              <a:buNone/>
-            </a:pPr>
-            <a:r>
-              <a:rPr lang="en-US" sz="1600" i="1" dirty="0">
-                <a:solidFill>
-                  <a:srgbClr val="2B7FFF"/>
-                </a:solidFill>
-                <a:latin typeface="Arial" pitchFamily="34" charset="0"/>
-                <a:ea typeface="Arial" pitchFamily="34" charset="-122"/>
-                <a:cs typeface="Arial" pitchFamily="34" charset="-120"/>
-              </a:rPr>
-              <a:t>“The opponent is the environment.”</a:t>
-            </a:r>
-            <a:endParaRPr lang="en-US" sz="1600" dirty="0"/>
-          </a:p>
-        </p:txBody>
-      </p:sp>
-      <p:sp>
-        <p:nvSpPr>
-          <p:cNvPr id="9" name="Text 6"/>
           <p:cNvSpPr/>
           <p:nvPr/>
         </p:nvSpPr>
@@ -5031,7 +5004,7 @@
                 <a:ea typeface="Arial" pitchFamily="34" charset="-122"/>
                 <a:cs typeface="Arial" pitchFamily="34" charset="-120"/>
               </a:rPr>
-              <a:t>Source: results/logs/2v2_seed{0,1,2}_1M.csv — per-iteration returns, 51-iter rolling mean</a:t>
+              <a:t>Source: results/logs/s1_5M.csv — per-iteration returns</a:t>
             </a:r>
             <a:endParaRPr lang="en-US" sz="1100" dirty="0"/>
           </a:p>
@@ -5141,7 +5114,7 @@
                 <a:ea typeface="Arial" pitchFamily="34" charset="-122"/>
                 <a:cs typeface="Arial" pitchFamily="34" charset="-120"/>
               </a:rPr>
-              <a:t>Beats random, loses to a hand-written tracker</a:t>
+              <a:t>Beats the reactive tracker, not the predictive one</a:t>
             </a:r>
             <a:endParaRPr lang="en-US" sz="3200" dirty="0"/>
           </a:p>
@@ -5218,7 +5191,7 @@
                 <a:ea typeface="Arial" pitchFamily="34" charset="-122"/>
                 <a:cs typeface="Arial" pitchFamily="34" charset="-120"/>
               </a:rPr>
-              <a:t>±0.27</a:t>
+              <a:t>0.63</a:t>
             </a:r>
             <a:endParaRPr lang="en-US" sz="4000" dirty="0"/>
           </a:p>
@@ -5257,7 +5230,7 @@
                 <a:ea typeface="Arial" pitchFamily="34" charset="-122"/>
                 <a:cs typeface="Arial" pitchFamily="34" charset="-120"/>
               </a:rPr>
-              <a:t>seed spread on the 0.68 win rate vs random — real skill, fragile across seeds</a:t>
+              <a:t>win rate vs the reactive scripted tracker (0.07 losses), +0.68 points per game</a:t>
             </a:r>
             <a:endParaRPr lang="en-US" sz="1300" dirty="0"/>
           </a:p>
@@ -5296,7 +5269,7 @@
                 <a:ea typeface="Arial" pitchFamily="34" charset="-122"/>
                 <a:cs typeface="Arial" pitchFamily="34" charset="-120"/>
               </a:rPr>
-              <a:t>A scripted ball tracker wins ~99% against every trained team. PPO-learned play is qualitatively behind hand-written defense at this budget.</a:t>
+              <a:t>Tracker games all hit the 2000-step cap: wins are low-scoring leads, not first-to-5. The predictive tracker is unbeaten — 87% scoreless draws.</a:t>
             </a:r>
             <a:endParaRPr lang="en-US" sz="1400" dirty="0"/>
           </a:p>
@@ -5335,7 +5308,7 @@
                 <a:ea typeface="Arial" pitchFamily="34" charset="-122"/>
                 <a:cs typeface="Arial" pitchFamily="34" charset="-120"/>
               </a:rPr>
-              <a:t>Source: results/summary.md — 3 seeds, 60 greedy episodes per run per opponent</a:t>
+              <a:t>Source: results/summary.md, results/eval_s1_5M*.json</a:t>
             </a:r>
             <a:endParaRPr lang="en-US" sz="1100" dirty="0"/>
           </a:p>
@@ -5445,7 +5418,7 @@
                 <a:ea typeface="Arial" pitchFamily="34" charset="-122"/>
                 <a:cs typeface="Arial" pitchFamily="34" charset="-120"/>
               </a:rPr>
-              <a:t>Positional roles emerge — nobody assigned them</a:t>
+              <a:t>Both guard the middle, each sweeps its side</a:t>
             </a:r>
             <a:endParaRPr lang="en-US" sz="3200" dirty="0"/>
           </a:p>
@@ -5453,7 +5426,7 @@
       </p:sp>
       <p:pic>
         <p:nvPicPr>
-          <p:cNvPr id="4" name="Image 0" descr="results/plots/coverage_heatmaps_seed0.png">    </p:cNvPr>
+          <p:cNvPr id="4" name="Image 0" descr="results/plots/coverage_heatmaps.png">    </p:cNvPr>
           <p:cNvPicPr>
             <a:picLocks noChangeAspect="1"/>
           </p:cNvPicPr>
@@ -5508,7 +5481,7 @@
                 <a:ea typeface="Arial" pitchFamily="34" charset="-122"/>
                 <a:cs typeface="Arial" pitchFamily="34" charset="-120"/>
               </a:rPr>
-              <a:t>Paddle y-position over normalized episode time, seed 0: each paddle holds a home band plus chase excursions</a:t>
+              <a:t>Paddle y-position over normalized episode time, 60 greedy self-play episodes (+y is down)</a:t>
             </a:r>
             <a:endParaRPr lang="en-US" sz="1300" dirty="0"/>
           </a:p>
@@ -5547,7 +5520,7 @@
                 <a:ea typeface="Arial" pitchFamily="34" charset="-122"/>
                 <a:cs typeface="Arial" pitchFamily="34" charset="-120"/>
               </a:rPr>
-              <a:t>A1 anchors mid-upper, A2 mid-lower with excursions to the top wall — the mirror structure appears on team B. No communication, no role assignment.</a:t>
+              <a:t>Each paddle parks at the inner edge of its range (the shared middle band) and sweeps out toward its own wall. Team B mirrors it. No communication, no role assignment.</a:t>
             </a:r>
             <a:endParaRPr lang="en-US" sz="1500" dirty="0"/>
           </a:p>
@@ -5586,7 +5559,7 @@
                 <a:ea typeface="Arial" pitchFamily="34" charset="-122"/>
                 <a:cs typeface="Arial" pitchFamily="34" charset="-120"/>
               </a:rPr>
-              <a:t>Source: results/traj_2v2_seed0_1M.npz — 20 greedy self-play episodes</a:t>
+              <a:t>Source: results/traj_s1_5M.npz</a:t>
             </a:r>
             <a:endParaRPr lang="en-US" sz="1100" dirty="0"/>
           </a:p>
@@ -5696,7 +5669,7 @@
                 <a:ea typeface="Arial" pitchFamily="34" charset="-122"/>
                 <a:cs typeface="Arial" pitchFamily="34" charset="-120"/>
               </a:rPr>
-              <a:t>Specialization is real — and not what we predicted</a:t>
+              <a:t>A primary middle defender emerges</a:t>
             </a:r>
             <a:endParaRPr lang="en-US" sz="3200" dirty="0"/>
           </a:p>
@@ -5759,7 +5732,7 @@
                 <a:ea typeface="Arial" pitchFamily="34" charset="-122"/>
                 <a:cs typeface="Arial" pitchFamily="34" charset="-120"/>
               </a:rPr>
-              <a:t>Teammate coverage overlap at checkpoints (lower = more specialized)</a:t>
+              <a:t>Team A coverage overlap at checkpoints (short greedy probes)</a:t>
             </a:r>
             <a:endParaRPr lang="en-US" sz="1200" dirty="0"/>
           </a:p>
@@ -5820,7 +5793,7 @@
                 <a:ea typeface="Arial" pitchFamily="34" charset="-122"/>
                 <a:cs typeface="Arial" pitchFamily="34" charset="-120"/>
               </a:rPr>
-              <a:t>0.01</a:t>
+              <a:t>~70%</a:t>
             </a:r>
             <a:endParaRPr lang="en-US" sz="4000" dirty="0"/>
           </a:p>
@@ -5837,7 +5810,7 @@
                 <a:ea typeface="Arial" pitchFamily="34" charset="-122"/>
                 <a:cs typeface="Arial" pitchFamily="34" charset="-120"/>
               </a:rPr>
-              <a:t>coverage overlap in seed 1 — a near-disjoint band partition, and the strongest team (0.67 win rate)</a:t>
+              <a:t>of shared-middle returns made by A2 (2.0 vs 0.9 per game), a role nobody assigned</a:t>
             </a:r>
             <a:endParaRPr lang="en-US" sz="4000" dirty="0"/>
           </a:p>
@@ -5880,7 +5853,7 @@
                 <a:ea typeface="Arial" pitchFamily="34" charset="-122"/>
                 <a:cs typeface="Arial" pitchFamily="34" charset="-120"/>
               </a:rPr>
-              <a:t>Overlap rises over training in all seeds — early policies barely move; later ones chase hard</a:t>
+              <a:t>Outer-band split (A1 low, A2 high) is forced by the ranges, not evidence by itself</a:t>
             </a:r>
             <a:endParaRPr lang="en-US" sz="1500" dirty="0"/>
           </a:p>
@@ -5901,7 +5874,7 @@
                 <a:ea typeface="Arial" pitchFamily="34" charset="-122"/>
                 <a:cs typeface="Arial" pitchFamily="34" charset="-120"/>
               </a:rPr>
-              <a:t>So complementary roles mean distinct anchors with shared pursuit, not disjoint coverage</a:t>
+              <a:t>Overlap rises 0.04 → 0.3 as both converge on the middle: lower overlap ≠ better coordination</a:t>
             </a:r>
             <a:endParaRPr lang="en-US" sz="1500" dirty="0"/>
           </a:p>
@@ -5922,7 +5895,7 @@
                 <a:ea typeface="Arial" pitchFamily="34" charset="-122"/>
                 <a:cs typeface="Arial" pitchFamily="34" charset="-120"/>
               </a:rPr>
-              <a:t>n = 3: the specialization-success link is suggestive, not causal</a:t>
+              <a:t>Shared reward, uneven work: A2 takes 57% of team contacts</a:t>
             </a:r>
             <a:endParaRPr lang="en-US" sz="1500" dirty="0"/>
           </a:p>
@@ -5961,7 +5934,7 @@
                 <a:ea typeface="Arial" pitchFamily="34" charset="-122"/>
                 <a:cs typeface="Arial" pitchFamily="34" charset="-120"/>
               </a:rPr>
-              <a:t>Source: overlap sweep over iter_*.pt checkpoints, 4 short greedy probes each</a:t>
+              <a:t>Source: results/eval_s1_5M.json (behavior.*.contact_region_share), overlap sweep over iter_*.pt</a:t>
             </a:r>
             <a:endParaRPr lang="en-US" sz="1100" dirty="0"/>
           </a:p>
@@ -6032,7 +6005,7 @@
                 <a:ea typeface="Arial" pitchFamily="34" charset="-122"/>
                 <a:cs typeface="Arial" pitchFamily="34" charset="-120"/>
               </a:rPr>
-              <a:t>FINDING 4 · CREDIT ASSIGNMENT</a:t>
+              <a:t>ROBUSTNESS</a:t>
             </a:r>
             <a:endParaRPr lang="en-US" sz="1200" dirty="0"/>
           </a:p>
@@ -6071,7 +6044,7 @@
                 <a:ea typeface="Arial" pitchFamily="34" charset="-122"/>
                 <a:cs typeface="Arial" pitchFamily="34" charset="-120"/>
               </a:rPr>
-              <a:t>Which team dominates is a seed lottery</a:t>
+              <a:t>More budget, stronger team</a:t>
             </a:r>
             <a:endParaRPr lang="en-US" sz="3200" dirty="0"/>
           </a:p>
@@ -6126,7 +6099,7 @@
                 <a:ea typeface="Arial" pitchFamily="34" charset="-122"/>
                 <a:cs typeface="Arial" pitchFamily="34" charset="-120"/>
               </a:rPr>
-              <a:t>Asymmetry entrenches</a:t>
+              <a:t>Why this run</a:t>
             </a:r>
             <a:endParaRPr lang="en-US" sz="2200" dirty="0"/>
           </a:p>
@@ -6169,7 +6142,7 @@
                 <a:ea typeface="Arial" pitchFamily="34" charset="-122"/>
                 <a:cs typeface="Arial" pitchFamily="34" charset="-120"/>
               </a:rPr>
-              <a:t>Shared reward cannot attribute a point to a paddle</a:t>
+              <a:t>Rollout 4096 beat rollout 1024, higher entropy, γ 0.999 and lower lr in a 1M sweep</a:t>
             </a:r>
             <a:endParaRPr lang="en-US" sz="1500" dirty="0"/>
           </a:p>
@@ -6190,7 +6163,7 @@
                 <a:ea typeface="Arial" pitchFamily="34" charset="-122"/>
                 <a:cs typeface="Arial" pitchFamily="34" charset="-120"/>
               </a:rPr>
-              <a:t>Whichever team stumbles into a better joint equilibrium early keeps it</a:t>
+              <a:t>Head-to-head, s1_5M's Team A finishes net-ahead of every other candidate's Team B</a:t>
             </a:r>
             <a:endParaRPr lang="en-US" sz="1500" dirty="0"/>
           </a:p>
@@ -6211,7 +6184,7 @@
                 <a:ea typeface="Arial" pitchFamily="34" charset="-122"/>
                 <a:cs typeface="Arial" pitchFamily="34" charset="-120"/>
               </a:rPr>
-              <a:t>Same setup, same budget — opposite winners. That variance is the credit-assignment caveat made visible</a:t>
+              <a:t>Across 3 seeds at 3M the tracker win rate spans 0.12–0.40: seed matters</a:t>
             </a:r>
             <a:endParaRPr lang="en-US" sz="1500" dirty="0"/>
           </a:p>
@@ -6250,7 +6223,7 @@
                 <a:ea typeface="Arial" pitchFamily="34" charset="-122"/>
                 <a:cs typeface="Arial" pitchFamily="34" charset="-120"/>
               </a:rPr>
-              <a:t>Source: results/eval_2v2_seed{0,1,2}_1M.json — self-play, 60 episodes each</a:t>
+              <a:t>Source: report/report.md §4.4 — archived comparison runs, same 60-episode protocol</a:t>
             </a:r>
             <a:endParaRPr lang="en-US" sz="1100" dirty="0"/>
           </a:p>
@@ -6375,7 +6348,7 @@
         <p:spPr>
           <a:xfrm>
             <a:off x="457200" y="2743200"/>
-            <a:ext cx="10058400" cy="1463040"/>
+            <a:ext cx="10515600" cy="1463040"/>
           </a:xfrm>
           <a:prstGeom prst="rect">
             <a:avLst/>
@@ -6399,7 +6372,7 @@
                 <a:ea typeface="Arial" pitchFamily="34" charset="-122"/>
                 <a:cs typeface="Arial" pitchFamily="34" charset="-120"/>
               </a:rPr>
-              <a:t>Complementary positional roles emerge without communication or role assignment — but coordination is a seed lottery, it does not grow monotonically, and win rate alone would have overstated it. Beating random requires zero coordination; the heatmaps are the evidence.</a:t>
+              <a:t>Without communication or assigned roles, teammates learn a consistent division of labour (each owns its outer band, one becomes the primary middle defender), and that team beats random play and a reactive tracker. It does not match a predictive hand-written defender, and it rests on one showcased seed.</a:t>
             </a:r>
             <a:endParaRPr lang="en-US" sz="2000" dirty="0"/>
           </a:p>
@@ -6477,7 +6450,7 @@
                 <a:ea typeface="Arial" pitchFamily="34" charset="-122"/>
                 <a:cs typeface="Arial" pitchFamily="34" charset="-120"/>
               </a:rPr>
-              <a:t>distinct home bands in every seed, from identical rewards and local views</a:t>
+              <a:t>a primary middle defender (A2, ~70% of shared-band returns) from identical rewards</a:t>
             </a:r>
             <a:endParaRPr lang="en-US" sz="1350" dirty="0"/>
           </a:p>
@@ -6516,7 +6489,7 @@
                 <a:ea typeface="Arial" pitchFamily="34" charset="-122"/>
                 <a:cs typeface="Arial" pitchFamily="34" charset="-120"/>
               </a:rPr>
-              <a:t>Varies</a:t>
+              <a:t>Works</a:t>
             </a:r>
             <a:endParaRPr lang="en-US" sz="2000" dirty="0"/>
           </a:p>
@@ -6555,7 +6528,7 @@
                 <a:ea typeface="Arial" pitchFamily="34" charset="-122"/>
                 <a:cs typeface="Arial" pitchFamily="34" charset="-120"/>
               </a:rPr>
-              <a:t>coverage overlap spans 0.01 - 0.28 across seeds at eval</a:t>
+              <a:t>1.00 vs random, 0.63 vs the reactive tracker over 60 greedy games each</a:t>
             </a:r>
             <a:endParaRPr lang="en-US" sz="1350" dirty="0"/>
           </a:p>
@@ -6594,7 +6567,7 @@
                 <a:ea typeface="Arial" pitchFamily="34" charset="-122"/>
                 <a:cs typeface="Arial" pitchFamily="34" charset="-120"/>
               </a:rPr>
-              <a:t>Correlates</a:t>
+              <a:t>Bounded</a:t>
             </a:r>
             <a:endParaRPr lang="en-US" sz="2000" dirty="0"/>
           </a:p>
@@ -6633,7 +6606,7 @@
                 <a:ea typeface="Arial" pitchFamily="34" charset="-122"/>
                 <a:cs typeface="Arial" pitchFamily="34" charset="-120"/>
               </a:rPr>
-              <a:t>the best-partitioned seed is also the strongest team (0.67 win rate)</a:t>
+              <a:t>predictive tracker unbeaten (87% draws); single-seed showcase</a:t>
             </a:r>
             <a:endParaRPr lang="en-US" sz="1350" dirty="0"/>
           </a:p>
